--- a/system-tailan.pptx
+++ b/system-tailan.pptx
@@ -18,6 +18,7 @@
     <p:sldId id="266" r:id="rId17"/>
     <p:sldId id="267" r:id="rId18"/>
     <p:sldId id="268" r:id="rId19"/>
+    <p:sldId id="271" r:id="rId22"/>
     <p:sldId id="269" r:id="rId20"/>
     <p:sldId id="270" r:id="rId21"/>
   </p:sldIdLst>
@@ -15775,7 +15776,7 @@
                 </a:solidFill>
                 <a:latin typeface="Arial"/>
               </a:rPr>
-              <a:t>12</a:t>
+              <a:t>13</a:t>
             </a:r>
           </a:p>
         </p:txBody>
@@ -16058,7 +16059,7 @@
                 </a:solidFill>
                 <a:latin typeface="Arial"/>
               </a:rPr>
-              <a:t>14</a:t>
+              <a:t>15</a:t>
             </a:r>
           </a:p>
         </p:txBody>
@@ -17906,6 +17907,1181 @@
                 <a:latin typeface="Arial"/>
               </a:rPr>
               <a:t>62 / 62 ажил · 100%</a:t>
+            </a:r>
+          </a:p>
+        </p:txBody>
+      </p:sp>
+    </p:spTree>
+  </p:cSld>
+  <p:clrMapOvr>
+    <a:masterClrMapping/>
+  </p:clrMapOvr>
+</p:sld>
+</file>
+
+<file path=ppt/slides/slide16.xml><?xml version="1.0" encoding="utf-8"?>
+<p:sld xmlns:a="http://schemas.openxmlformats.org/drawingml/2006/main" xmlns:p="http://schemas.openxmlformats.org/presentationml/2006/main" xmlns:r="http://schemas.openxmlformats.org/officeDocument/2006/relationships">
+  <p:cSld>
+    <p:spTree>
+      <p:nvGrpSpPr>
+        <p:cNvPr id="1" name=""/>
+        <p:cNvGrpSpPr/>
+        <p:nvPr/>
+      </p:nvGrpSpPr>
+      <p:grpSpPr/>
+      <p:sp>
+        <p:nvSpPr>
+          <p:cNvPr id="2" name="Rectangle 1"/>
+          <p:cNvSpPr/>
+          <p:nvPr/>
+        </p:nvSpPr>
+        <p:spPr>
+          <a:xfrm>
+            <a:off x="0" y="0"/>
+            <a:ext cx="12191695" cy="6858000"/>
+          </a:xfrm>
+          <a:prstGeom prst="rect">
+            <a:avLst/>
+          </a:prstGeom>
+          <a:solidFill>
+            <a:srgbClr val="F7F9FB"/>
+          </a:solidFill>
+          <a:ln>
+            <a:noFill/>
+          </a:ln>
+          <a:effectLst/>
+        </p:spPr>
+        <p:style>
+          <a:lnRef idx="1">
+            <a:schemeClr val="accent1"/>
+          </a:lnRef>
+          <a:fillRef idx="3">
+            <a:schemeClr val="accent1"/>
+          </a:fillRef>
+          <a:effectRef idx="2">
+            <a:schemeClr val="accent1"/>
+          </a:effectRef>
+          <a:fontRef idx="minor">
+            <a:schemeClr val="lt1"/>
+          </a:fontRef>
+        </p:style>
+        <p:txBody>
+          <a:bodyPr rtlCol="0" anchor="ctr"/>
+          <a:lstStyle/>
+          <a:p>
+            <a:pPr algn="ctr"/>
+          </a:p>
+        </p:txBody>
+      </p:sp>
+      <p:sp>
+        <p:nvSpPr>
+          <p:cNvPr id="3" name="Rectangle 2"/>
+          <p:cNvSpPr/>
+          <p:nvPr/>
+        </p:nvSpPr>
+        <p:spPr>
+          <a:xfrm>
+            <a:off x="502920" y="384048"/>
+            <a:ext cx="658368" cy="658368"/>
+          </a:xfrm>
+          <a:prstGeom prst="rect">
+            <a:avLst/>
+          </a:prstGeom>
+          <a:solidFill>
+            <a:srgbClr val="0E2440"/>
+          </a:solidFill>
+          <a:ln>
+            <a:noFill/>
+          </a:ln>
+          <a:effectLst/>
+        </p:spPr>
+        <p:style>
+          <a:lnRef idx="1">
+            <a:schemeClr val="accent1"/>
+          </a:lnRef>
+          <a:fillRef idx="3">
+            <a:schemeClr val="accent1"/>
+          </a:fillRef>
+          <a:effectRef idx="2">
+            <a:schemeClr val="accent1"/>
+          </a:effectRef>
+          <a:fontRef idx="minor">
+            <a:schemeClr val="lt1"/>
+          </a:fontRef>
+        </p:style>
+        <p:txBody>
+          <a:bodyPr rtlCol="0" anchor="ctr"/>
+          <a:lstStyle/>
+          <a:p>
+            <a:pPr algn="ctr"/>
+          </a:p>
+        </p:txBody>
+      </p:sp>
+      <p:sp>
+        <p:nvSpPr>
+          <p:cNvPr id="4" name="TextBox 3"/>
+          <p:cNvSpPr txBox="1"/>
+          <p:nvPr/>
+        </p:nvSpPr>
+        <p:spPr>
+          <a:xfrm>
+            <a:off x="502920" y="548640"/>
+            <a:ext cx="658368" cy="365760"/>
+          </a:xfrm>
+          <a:prstGeom prst="rect">
+            <a:avLst/>
+          </a:prstGeom>
+          <a:noFill/>
+        </p:spPr>
+        <p:txBody>
+          <a:bodyPr wrap="square" lIns="0" rIns="0" tIns="0" bIns="0">
+            <a:spAutoFit/>
+          </a:bodyPr>
+          <a:lstStyle/>
+          <a:p>
+            <a:pPr algn="ctr"/>
+            <a:r>
+              <a:rPr sz="1500" b="1">
+                <a:solidFill>
+                  <a:srgbClr val="FFFFFF"/>
+                </a:solidFill>
+                <a:latin typeface="Arial"/>
+              </a:rPr>
+              <a:t>12</a:t>
+            </a:r>
+          </a:p>
+        </p:txBody>
+      </p:sp>
+      <p:sp>
+        <p:nvSpPr>
+          <p:cNvPr id="5" name="TextBox 4"/>
+          <p:cNvSpPr txBox="1"/>
+          <p:nvPr/>
+        </p:nvSpPr>
+        <p:spPr>
+          <a:xfrm>
+            <a:off x="1353312" y="365760"/>
+            <a:ext cx="10332720" cy="1005840"/>
+          </a:xfrm>
+          <a:prstGeom prst="rect">
+            <a:avLst/>
+          </a:prstGeom>
+          <a:noFill/>
+        </p:spPr>
+        <p:txBody>
+          <a:bodyPr wrap="square" lIns="0" rIns="0" tIns="0" bIns="0">
+            <a:spAutoFit/>
+          </a:bodyPr>
+          <a:lstStyle/>
+          <a:p>
+            <a:r>
+              <a:rPr sz="2400" b="1">
+                <a:solidFill>
+                  <a:srgbClr val="0E2440"/>
+                </a:solidFill>
+                <a:latin typeface="Arial"/>
+              </a:rPr>
+              <a:t>Хуучин мэдээллийн импорт</a:t>
+            </a:r>
+          </a:p>
+          <a:p>
+            <a:pPr>
+              <a:spcBef>
+                <a:spcPts val="360"/>
+              </a:spcBef>
+            </a:pPr>
+            <a:r>
+              <a:rPr sz="1200" b="0">
+                <a:solidFill>
+                  <a:srgbClr val="8A929A"/>
+                </a:solidFill>
+                <a:latin typeface="Arial"/>
+              </a:rPr>
+              <a:t>Эх файл ба өгөгдлийн сангийн тоон харьцуулалт</a:t>
+            </a:r>
+          </a:p>
+        </p:txBody>
+      </p:sp>
+      <p:sp>
+        <p:nvSpPr>
+          <p:cNvPr id="6" name="Rectangle 5"/>
+          <p:cNvSpPr/>
+          <p:nvPr/>
+        </p:nvSpPr>
+        <p:spPr>
+          <a:xfrm>
+            <a:off x="502920" y="1261872"/>
+            <a:ext cx="11185855" cy="18288"/>
+          </a:xfrm>
+          <a:prstGeom prst="rect">
+            <a:avLst/>
+          </a:prstGeom>
+          <a:solidFill>
+            <a:srgbClr val="DDE3E9"/>
+          </a:solidFill>
+          <a:ln>
+            <a:noFill/>
+          </a:ln>
+          <a:effectLst/>
+        </p:spPr>
+        <p:style>
+          <a:lnRef idx="1">
+            <a:schemeClr val="accent1"/>
+          </a:lnRef>
+          <a:fillRef idx="3">
+            <a:schemeClr val="accent1"/>
+          </a:fillRef>
+          <a:effectRef idx="2">
+            <a:schemeClr val="accent1"/>
+          </a:effectRef>
+          <a:fontRef idx="minor">
+            <a:schemeClr val="lt1"/>
+          </a:fontRef>
+        </p:style>
+        <p:txBody>
+          <a:bodyPr rtlCol="0" anchor="ctr"/>
+          <a:lstStyle/>
+          <a:p>
+            <a:pPr algn="ctr"/>
+          </a:p>
+        </p:txBody>
+      </p:sp>
+      <p:sp>
+        <p:nvSpPr>
+          <p:cNvPr id="7" name="Rectangle 6"/>
+          <p:cNvSpPr/>
+          <p:nvPr/>
+        </p:nvSpPr>
+        <p:spPr>
+          <a:xfrm>
+            <a:off x="502920" y="1243584"/>
+            <a:ext cx="822960" cy="41148"/>
+          </a:xfrm>
+          <a:prstGeom prst="rect">
+            <a:avLst/>
+          </a:prstGeom>
+          <a:solidFill>
+            <a:srgbClr val="02C0CE"/>
+          </a:solidFill>
+          <a:ln>
+            <a:noFill/>
+          </a:ln>
+          <a:effectLst/>
+        </p:spPr>
+        <p:style>
+          <a:lnRef idx="1">
+            <a:schemeClr val="accent1"/>
+          </a:lnRef>
+          <a:fillRef idx="3">
+            <a:schemeClr val="accent1"/>
+          </a:fillRef>
+          <a:effectRef idx="2">
+            <a:schemeClr val="accent1"/>
+          </a:effectRef>
+          <a:fontRef idx="minor">
+            <a:schemeClr val="lt1"/>
+          </a:fontRef>
+        </p:style>
+        <p:txBody>
+          <a:bodyPr rtlCol="0" anchor="ctr"/>
+          <a:lstStyle/>
+          <a:p>
+            <a:pPr algn="ctr"/>
+          </a:p>
+        </p:txBody>
+      </p:sp>
+      <p:sp>
+        <p:nvSpPr>
+          <p:cNvPr id="8" name="TextBox 7"/>
+          <p:cNvSpPr txBox="1"/>
+          <p:nvPr/>
+        </p:nvSpPr>
+        <p:spPr>
+          <a:xfrm>
+            <a:off x="502920" y="1554480"/>
+            <a:ext cx="5464911" cy="201168"/>
+          </a:xfrm>
+          <a:prstGeom prst="rect">
+            <a:avLst/>
+          </a:prstGeom>
+          <a:noFill/>
+        </p:spPr>
+        <p:txBody>
+          <a:bodyPr wrap="square" lIns="0" rIns="0" tIns="0" bIns="0">
+            <a:spAutoFit/>
+          </a:bodyPr>
+          <a:lstStyle/>
+          <a:p>
+            <a:r>
+              <a:rPr sz="950" b="1">
+                <a:solidFill>
+                  <a:srgbClr val="0E2440"/>
+                </a:solidFill>
+                <a:latin typeface="Arial"/>
+              </a:rPr>
+              <a:t>ЭХ ФАЙЛААС УНШСАН</a:t>
+            </a:r>
+          </a:p>
+        </p:txBody>
+      </p:sp>
+      <p:sp>
+        <p:nvSpPr>
+          <p:cNvPr id="9" name="Rectangle 8"/>
+          <p:cNvSpPr/>
+          <p:nvPr/>
+        </p:nvSpPr>
+        <p:spPr>
+          <a:xfrm>
+            <a:off x="502920" y="1773936"/>
+            <a:ext cx="5464911" cy="10972"/>
+          </a:xfrm>
+          <a:prstGeom prst="rect">
+            <a:avLst/>
+          </a:prstGeom>
+          <a:solidFill>
+            <a:srgbClr val="DDE3E9"/>
+          </a:solidFill>
+          <a:ln>
+            <a:noFill/>
+          </a:ln>
+          <a:effectLst/>
+        </p:spPr>
+        <p:style>
+          <a:lnRef idx="1">
+            <a:schemeClr val="accent1"/>
+          </a:lnRef>
+          <a:fillRef idx="3">
+            <a:schemeClr val="accent1"/>
+          </a:fillRef>
+          <a:effectRef idx="2">
+            <a:schemeClr val="accent1"/>
+          </a:effectRef>
+          <a:fontRef idx="minor">
+            <a:schemeClr val="lt1"/>
+          </a:fontRef>
+        </p:style>
+        <p:txBody>
+          <a:bodyPr rtlCol="0" anchor="ctr"/>
+          <a:lstStyle/>
+          <a:p>
+            <a:pPr algn="ctr"/>
+          </a:p>
+        </p:txBody>
+      </p:sp>
+      <p:sp>
+        <p:nvSpPr>
+          <p:cNvPr id="10" name="TextBox 9"/>
+          <p:cNvSpPr txBox="1"/>
+          <p:nvPr/>
+        </p:nvSpPr>
+        <p:spPr>
+          <a:xfrm>
+            <a:off x="502920" y="1975104"/>
+            <a:ext cx="5464911" cy="274320"/>
+          </a:xfrm>
+          <a:prstGeom prst="rect">
+            <a:avLst/>
+          </a:prstGeom>
+          <a:noFill/>
+        </p:spPr>
+        <p:txBody>
+          <a:bodyPr wrap="square" lIns="0" rIns="0" tIns="0" bIns="0">
+            <a:spAutoFit/>
+          </a:bodyPr>
+          <a:lstStyle/>
+          <a:p>
+            <a:pPr>
+              <a:lnSpc>
+                <a:spcPct val="118000"/>
+              </a:lnSpc>
+              <a:spcAft>
+                <a:spcPts val="900"/>
+              </a:spcAft>
+            </a:pPr>
+            <a:r>
+              <a:rPr sz="1000" b="1">
+                <a:solidFill>
+                  <a:srgbClr val="02C0CE"/>
+                </a:solidFill>
+                <a:latin typeface="Arial"/>
+              </a:rPr>
+              <a:t>▪  </a:t>
+            </a:r>
+            <a:r>
+              <a:rPr sz="1000" b="1">
+                <a:solidFill>
+                  <a:srgbClr val="0E2440"/>
+                </a:solidFill>
+                <a:latin typeface="Arial"/>
+              </a:rPr>
+              <a:t>Чөлөөлөлтийн зураг — </a:t>
+            </a:r>
+            <a:r>
+              <a:rPr sz="1000" b="0">
+                <a:solidFill>
+                  <a:srgbClr val="4A5560"/>
+                </a:solidFill>
+                <a:latin typeface="Arial"/>
+              </a:rPr>
+              <a:t>1 shp файл, 26 хил</a:t>
+            </a:r>
+          </a:p>
+          <a:p>
+            <a:pPr>
+              <a:lnSpc>
+                <a:spcPct val="118000"/>
+              </a:lnSpc>
+              <a:spcAft>
+                <a:spcPts val="900"/>
+              </a:spcAft>
+            </a:pPr>
+            <a:r>
+              <a:rPr sz="1000" b="1">
+                <a:solidFill>
+                  <a:srgbClr val="02C0CE"/>
+                </a:solidFill>
+                <a:latin typeface="Arial"/>
+              </a:rPr>
+              <a:t>▪  </a:t>
+            </a:r>
+            <a:r>
+              <a:rPr sz="1000" b="1">
+                <a:solidFill>
+                  <a:srgbClr val="0E2440"/>
+                </a:solidFill>
+                <a:latin typeface="Arial"/>
+              </a:rPr>
+              <a:t>Нэгж талбарын зураг — </a:t>
+            </a:r>
+            <a:r>
+              <a:rPr sz="1000" b="0">
+                <a:solidFill>
+                  <a:srgbClr val="4A5560"/>
+                </a:solidFill>
+                <a:latin typeface="Arial"/>
+              </a:rPr>
+              <a:t>15 shp файл, 6 329 объект, 5 896 өвөрмөц дугаар</a:t>
+            </a:r>
+          </a:p>
+          <a:p>
+            <a:pPr>
+              <a:lnSpc>
+                <a:spcPct val="118000"/>
+              </a:lnSpc>
+              <a:spcAft>
+                <a:spcPts val="900"/>
+              </a:spcAft>
+            </a:pPr>
+            <a:r>
+              <a:rPr sz="1000" b="1">
+                <a:solidFill>
+                  <a:srgbClr val="02C0CE"/>
+                </a:solidFill>
+                <a:latin typeface="Arial"/>
+              </a:rPr>
+              <a:t>▪  </a:t>
+            </a:r>
+            <a:r>
+              <a:rPr sz="1000" b="1">
+                <a:solidFill>
+                  <a:srgbClr val="0E2440"/>
+                </a:solidFill>
+                <a:latin typeface="Arial"/>
+              </a:rPr>
+              <a:t>Үнэлгээний тайлан — </a:t>
+            </a:r>
+            <a:r>
+              <a:rPr sz="1000" b="0">
+                <a:solidFill>
+                  <a:srgbClr val="4A5560"/>
+                </a:solidFill>
+                <a:latin typeface="Arial"/>
+              </a:rPr>
+              <a:t>3 061 мөр, 780.1 тэрбум ₮</a:t>
+            </a:r>
+          </a:p>
+          <a:p>
+            <a:pPr>
+              <a:lnSpc>
+                <a:spcPct val="118000"/>
+              </a:lnSpc>
+              <a:spcAft>
+                <a:spcPts val="900"/>
+              </a:spcAft>
+            </a:pPr>
+            <a:r>
+              <a:rPr sz="1000" b="1">
+                <a:solidFill>
+                  <a:srgbClr val="02C0CE"/>
+                </a:solidFill>
+                <a:latin typeface="Arial"/>
+              </a:rPr>
+              <a:t>▪  </a:t>
+            </a:r>
+            <a:r>
+              <a:rPr sz="1000" b="1">
+                <a:solidFill>
+                  <a:srgbClr val="0E2440"/>
+                </a:solidFill>
+                <a:latin typeface="Arial"/>
+              </a:rPr>
+              <a:t>Архивын тайлан 2010–2025 — </a:t>
+            </a:r>
+            <a:r>
+              <a:rPr sz="1000" b="0">
+                <a:solidFill>
+                  <a:srgbClr val="4A5560"/>
+                </a:solidFill>
+                <a:latin typeface="Arial"/>
+              </a:rPr>
+              <a:t>7 548 мөр, 1 257.3 тэрбум ₮</a:t>
+            </a:r>
+          </a:p>
+          <a:p>
+            <a:pPr>
+              <a:lnSpc>
+                <a:spcPct val="118000"/>
+              </a:lnSpc>
+              <a:spcAft>
+                <a:spcPts val="900"/>
+              </a:spcAft>
+            </a:pPr>
+            <a:r>
+              <a:rPr sz="1000" b="1">
+                <a:solidFill>
+                  <a:srgbClr val="02C0CE"/>
+                </a:solidFill>
+                <a:latin typeface="Arial"/>
+              </a:rPr>
+              <a:t>▪  </a:t>
+            </a:r>
+            <a:r>
+              <a:rPr sz="1000" b="1">
+                <a:solidFill>
+                  <a:srgbClr val="0E2440"/>
+                </a:solidFill>
+                <a:latin typeface="Arial"/>
+              </a:rPr>
+              <a:t>Хоёр тайланд давхцсан — </a:t>
+            </a:r>
+            <a:r>
+              <a:rPr sz="1000" b="0">
+                <a:solidFill>
+                  <a:srgbClr val="4A5560"/>
+                </a:solidFill>
+                <a:latin typeface="Arial"/>
+              </a:rPr>
+              <a:t>2 301 нэгж талбар</a:t>
+            </a:r>
+          </a:p>
+          <a:p>
+            <a:pPr>
+              <a:lnSpc>
+                <a:spcPct val="118000"/>
+              </a:lnSpc>
+              <a:spcAft>
+                <a:spcPts val="900"/>
+              </a:spcAft>
+            </a:pPr>
+            <a:r>
+              <a:rPr sz="1000" b="1">
+                <a:solidFill>
+                  <a:srgbClr val="02C0CE"/>
+                </a:solidFill>
+                <a:latin typeface="Arial"/>
+              </a:rPr>
+              <a:t>▪  </a:t>
+            </a:r>
+            <a:r>
+              <a:rPr sz="1000" b="1">
+                <a:solidFill>
+                  <a:srgbClr val="0E2440"/>
+                </a:solidFill>
+                <a:latin typeface="Arial"/>
+              </a:rPr>
+              <a:t>Нийт эх мөр — </a:t>
+            </a:r>
+            <a:r>
+              <a:rPr sz="1000" b="0">
+                <a:solidFill>
+                  <a:srgbClr val="4A5560"/>
+                </a:solidFill>
+                <a:latin typeface="Arial"/>
+              </a:rPr>
+              <a:t>10 473 (давхцлыг хассан 4 652 дугаартай талбар)</a:t>
+            </a:r>
+          </a:p>
+        </p:txBody>
+      </p:sp>
+      <p:sp>
+        <p:nvSpPr>
+          <p:cNvPr id="11" name="TextBox 10"/>
+          <p:cNvSpPr txBox="1"/>
+          <p:nvPr/>
+        </p:nvSpPr>
+        <p:spPr>
+          <a:xfrm>
+            <a:off x="6223863" y="1554480"/>
+            <a:ext cx="5464911" cy="201168"/>
+          </a:xfrm>
+          <a:prstGeom prst="rect">
+            <a:avLst/>
+          </a:prstGeom>
+          <a:noFill/>
+        </p:spPr>
+        <p:txBody>
+          <a:bodyPr wrap="square" lIns="0" rIns="0" tIns="0" bIns="0">
+            <a:spAutoFit/>
+          </a:bodyPr>
+          <a:lstStyle/>
+          <a:p>
+            <a:r>
+              <a:rPr sz="950" b="1">
+                <a:solidFill>
+                  <a:srgbClr val="0E2440"/>
+                </a:solidFill>
+                <a:latin typeface="Arial"/>
+              </a:rPr>
+              <a:t>ӨГӨГДЛИЙН САНД БҮРТГЭГДСЭН</a:t>
+            </a:r>
+          </a:p>
+        </p:txBody>
+      </p:sp>
+      <p:sp>
+        <p:nvSpPr>
+          <p:cNvPr id="12" name="Rectangle 11"/>
+          <p:cNvSpPr/>
+          <p:nvPr/>
+        </p:nvSpPr>
+        <p:spPr>
+          <a:xfrm>
+            <a:off x="6223863" y="1773936"/>
+            <a:ext cx="5464911" cy="10972"/>
+          </a:xfrm>
+          <a:prstGeom prst="rect">
+            <a:avLst/>
+          </a:prstGeom>
+          <a:solidFill>
+            <a:srgbClr val="DDE3E9"/>
+          </a:solidFill>
+          <a:ln>
+            <a:noFill/>
+          </a:ln>
+          <a:effectLst/>
+        </p:spPr>
+        <p:style>
+          <a:lnRef idx="1">
+            <a:schemeClr val="accent1"/>
+          </a:lnRef>
+          <a:fillRef idx="3">
+            <a:schemeClr val="accent1"/>
+          </a:fillRef>
+          <a:effectRef idx="2">
+            <a:schemeClr val="accent1"/>
+          </a:effectRef>
+          <a:fontRef idx="minor">
+            <a:schemeClr val="lt1"/>
+          </a:fontRef>
+        </p:style>
+        <p:txBody>
+          <a:bodyPr rtlCol="0" anchor="ctr"/>
+          <a:lstStyle/>
+          <a:p>
+            <a:pPr algn="ctr"/>
+          </a:p>
+        </p:txBody>
+      </p:sp>
+      <p:sp>
+        <p:nvSpPr>
+          <p:cNvPr id="13" name="TextBox 12"/>
+          <p:cNvSpPr txBox="1"/>
+          <p:nvPr/>
+        </p:nvSpPr>
+        <p:spPr>
+          <a:xfrm>
+            <a:off x="6223863" y="1975104"/>
+            <a:ext cx="5464911" cy="274320"/>
+          </a:xfrm>
+          <a:prstGeom prst="rect">
+            <a:avLst/>
+          </a:prstGeom>
+          <a:noFill/>
+        </p:spPr>
+        <p:txBody>
+          <a:bodyPr wrap="square" lIns="0" rIns="0" tIns="0" bIns="0">
+            <a:spAutoFit/>
+          </a:bodyPr>
+          <a:lstStyle/>
+          <a:p>
+            <a:pPr>
+              <a:lnSpc>
+                <a:spcPct val="118000"/>
+              </a:lnSpc>
+              <a:spcAft>
+                <a:spcPts val="900"/>
+              </a:spcAft>
+            </a:pPr>
+            <a:r>
+              <a:rPr sz="1000" b="1">
+                <a:solidFill>
+                  <a:srgbClr val="2A78D6"/>
+                </a:solidFill>
+                <a:latin typeface="Arial"/>
+              </a:rPr>
+              <a:t>▪  </a:t>
+            </a:r>
+            <a:r>
+              <a:rPr sz="1000" b="1">
+                <a:solidFill>
+                  <a:srgbClr val="0E2440"/>
+                </a:solidFill>
+                <a:latin typeface="Arial"/>
+              </a:rPr>
+              <a:t>Чөлөөлөлт — </a:t>
+            </a:r>
+            <a:r>
+              <a:rPr sz="1000" b="0">
+                <a:solidFill>
+                  <a:srgbClr val="4A5560"/>
+                </a:solidFill>
+                <a:latin typeface="Arial"/>
+              </a:rPr>
+              <a:t>745 (26 хилтэй, 719 архиваас)</a:t>
+            </a:r>
+          </a:p>
+          <a:p>
+            <a:pPr>
+              <a:lnSpc>
+                <a:spcPct val="118000"/>
+              </a:lnSpc>
+              <a:spcAft>
+                <a:spcPts val="900"/>
+              </a:spcAft>
+            </a:pPr>
+            <a:r>
+              <a:rPr sz="1000" b="1">
+                <a:solidFill>
+                  <a:srgbClr val="2A78D6"/>
+                </a:solidFill>
+                <a:latin typeface="Arial"/>
+              </a:rPr>
+              <a:t>▪  </a:t>
+            </a:r>
+            <a:r>
+              <a:rPr sz="1000" b="1">
+                <a:solidFill>
+                  <a:srgbClr val="0E2440"/>
+                </a:solidFill>
+                <a:latin typeface="Arial"/>
+              </a:rPr>
+              <a:t>Нэгж талбар — </a:t>
+            </a:r>
+            <a:r>
+              <a:rPr sz="1000" b="0">
+                <a:solidFill>
+                  <a:srgbClr val="4A5560"/>
+                </a:solidFill>
+                <a:latin typeface="Arial"/>
+              </a:rPr>
+              <a:t>11 248 (9 743 бодит дугаар, 1 343 ERR, 162 D)</a:t>
+            </a:r>
+          </a:p>
+          <a:p>
+            <a:pPr>
+              <a:lnSpc>
+                <a:spcPct val="118000"/>
+              </a:lnSpc>
+              <a:spcAft>
+                <a:spcPts val="900"/>
+              </a:spcAft>
+            </a:pPr>
+            <a:r>
+              <a:rPr sz="1000" b="1">
+                <a:solidFill>
+                  <a:srgbClr val="2A78D6"/>
+                </a:solidFill>
+                <a:latin typeface="Arial"/>
+              </a:rPr>
+              <a:t>▪  </a:t>
+            </a:r>
+            <a:r>
+              <a:rPr sz="1000" b="1">
+                <a:solidFill>
+                  <a:srgbClr val="0E2440"/>
+                </a:solidFill>
+                <a:latin typeface="Arial"/>
+              </a:rPr>
+              <a:t>Газрын зурагт харагдах — </a:t>
+            </a:r>
+            <a:r>
+              <a:rPr sz="1000" b="0">
+                <a:solidFill>
+                  <a:srgbClr val="4A5560"/>
+                </a:solidFill>
+                <a:latin typeface="Arial"/>
+              </a:rPr>
+              <a:t>9 886 талбар</a:t>
+            </a:r>
+          </a:p>
+          <a:p>
+            <a:pPr>
+              <a:lnSpc>
+                <a:spcPct val="118000"/>
+              </a:lnSpc>
+              <a:spcAft>
+                <a:spcPts val="900"/>
+              </a:spcAft>
+            </a:pPr>
+            <a:r>
+              <a:rPr sz="1000" b="1">
+                <a:solidFill>
+                  <a:srgbClr val="2A78D6"/>
+                </a:solidFill>
+                <a:latin typeface="Arial"/>
+              </a:rPr>
+              <a:t>▪  </a:t>
+            </a:r>
+            <a:r>
+              <a:rPr sz="1000" b="1">
+                <a:solidFill>
+                  <a:srgbClr val="0E2440"/>
+                </a:solidFill>
+                <a:latin typeface="Arial"/>
+              </a:rPr>
+              <a:t>Нөхөх олговор — </a:t>
+            </a:r>
+            <a:r>
+              <a:rPr sz="1000" b="0">
+                <a:solidFill>
+                  <a:srgbClr val="4A5560"/>
+                </a:solidFill>
+                <a:latin typeface="Arial"/>
+              </a:rPr>
+              <a:t>25 886 бичилт, 7 896 нэгж талбарт</a:t>
+            </a:r>
+          </a:p>
+          <a:p>
+            <a:pPr>
+              <a:lnSpc>
+                <a:spcPct val="118000"/>
+              </a:lnSpc>
+              <a:spcAft>
+                <a:spcPts val="900"/>
+              </a:spcAft>
+            </a:pPr>
+            <a:r>
+              <a:rPr sz="1000" b="1">
+                <a:solidFill>
+                  <a:srgbClr val="2A78D6"/>
+                </a:solidFill>
+                <a:latin typeface="Arial"/>
+              </a:rPr>
+              <a:t>▪  </a:t>
+            </a:r>
+            <a:r>
+              <a:rPr sz="1000" b="1">
+                <a:solidFill>
+                  <a:srgbClr val="0E2440"/>
+                </a:solidFill>
+                <a:latin typeface="Arial"/>
+              </a:rPr>
+              <a:t>Захирамжийн төсөл — </a:t>
+            </a:r>
+            <a:r>
+              <a:rPr sz="1000" b="0">
+                <a:solidFill>
+                  <a:srgbClr val="4A5560"/>
+                </a:solidFill>
+                <a:latin typeface="Arial"/>
+              </a:rPr>
+              <a:t>1 087, санхүүгийн эх үүсвэр 18</a:t>
+            </a:r>
+          </a:p>
+          <a:p>
+            <a:pPr>
+              <a:lnSpc>
+                <a:spcPct val="118000"/>
+              </a:lnSpc>
+              <a:spcAft>
+                <a:spcPts val="900"/>
+              </a:spcAft>
+            </a:pPr>
+            <a:r>
+              <a:rPr sz="1000" b="1">
+                <a:solidFill>
+                  <a:srgbClr val="2A78D6"/>
+                </a:solidFill>
+                <a:latin typeface="Arial"/>
+              </a:rPr>
+              <a:t>▪  </a:t>
+            </a:r>
+            <a:r>
+              <a:rPr sz="1000" b="1">
+                <a:solidFill>
+                  <a:srgbClr val="0E2440"/>
+                </a:solidFill>
+                <a:latin typeface="Arial"/>
+              </a:rPr>
+              <a:t>Гараар залруулах — </a:t>
+            </a:r>
+            <a:r>
+              <a:rPr sz="1000" b="0">
+                <a:solidFill>
+                  <a:srgbClr val="4A5560"/>
+                </a:solidFill>
+                <a:latin typeface="Arial"/>
+              </a:rPr>
+              <a:t>1 362 талбарын хил, 1 343 дугаар</a:t>
+            </a:r>
+          </a:p>
+        </p:txBody>
+      </p:sp>
+      <p:sp>
+        <p:nvSpPr>
+          <p:cNvPr id="14" name="Rectangle 13"/>
+          <p:cNvSpPr/>
+          <p:nvPr/>
+        </p:nvSpPr>
+        <p:spPr>
+          <a:xfrm>
+            <a:off x="502920" y="4937760"/>
+            <a:ext cx="11185855" cy="932688"/>
+          </a:xfrm>
+          <a:prstGeom prst="rect">
+            <a:avLst/>
+          </a:prstGeom>
+          <a:solidFill>
+            <a:srgbClr val="0E2440"/>
+          </a:solidFill>
+          <a:ln>
+            <a:noFill/>
+          </a:ln>
+          <a:effectLst/>
+        </p:spPr>
+        <p:style>
+          <a:lnRef idx="1">
+            <a:schemeClr val="accent1"/>
+          </a:lnRef>
+          <a:fillRef idx="3">
+            <a:schemeClr val="accent1"/>
+          </a:fillRef>
+          <a:effectRef idx="2">
+            <a:schemeClr val="accent1"/>
+          </a:effectRef>
+          <a:fontRef idx="minor">
+            <a:schemeClr val="lt1"/>
+          </a:fontRef>
+        </p:style>
+        <p:txBody>
+          <a:bodyPr rtlCol="0" anchor="ctr"/>
+          <a:lstStyle/>
+          <a:p>
+            <a:pPr algn="ctr"/>
+          </a:p>
+        </p:txBody>
+      </p:sp>
+      <p:sp>
+        <p:nvSpPr>
+          <p:cNvPr id="15" name="TextBox 14"/>
+          <p:cNvSpPr txBox="1"/>
+          <p:nvPr/>
+        </p:nvSpPr>
+        <p:spPr>
+          <a:xfrm>
+            <a:off x="758952" y="5138928"/>
+            <a:ext cx="2286000" cy="548640"/>
+          </a:xfrm>
+          <a:prstGeom prst="rect">
+            <a:avLst/>
+          </a:prstGeom>
+          <a:noFill/>
+        </p:spPr>
+        <p:txBody>
+          <a:bodyPr wrap="square" lIns="0" rIns="0" tIns="0" bIns="0">
+            <a:spAutoFit/>
+          </a:bodyPr>
+          <a:lstStyle/>
+          <a:p>
+            <a:r>
+              <a:rPr sz="3000" b="1">
+                <a:solidFill>
+                  <a:srgbClr val="02C0CE"/>
+                </a:solidFill>
+                <a:latin typeface="Arial"/>
+              </a:rPr>
+              <a:t>1 680</a:t>
+            </a:r>
+            <a:r>
+              <a:rPr sz="1300" b="1">
+                <a:solidFill>
+                  <a:srgbClr val="02C0CE"/>
+                </a:solidFill>
+                <a:latin typeface="Arial"/>
+              </a:rPr>
+              <a:t> тэрбум ₮</a:t>
+            </a:r>
+          </a:p>
+        </p:txBody>
+      </p:sp>
+      <p:sp>
+        <p:nvSpPr>
+          <p:cNvPr id="16" name="TextBox 15"/>
+          <p:cNvSpPr txBox="1"/>
+          <p:nvPr/>
+        </p:nvSpPr>
+        <p:spPr>
+          <a:xfrm>
+            <a:off x="3200400" y="5138928"/>
+            <a:ext cx="8213855" cy="731520"/>
+          </a:xfrm>
+          <a:prstGeom prst="rect">
+            <a:avLst/>
+          </a:prstGeom>
+          <a:noFill/>
+        </p:spPr>
+        <p:txBody>
+          <a:bodyPr wrap="square" lIns="0" rIns="0" tIns="0" bIns="0">
+            <a:spAutoFit/>
+          </a:bodyPr>
+          <a:lstStyle/>
+          <a:p>
+            <a:r>
+              <a:rPr sz="1300" b="1">
+                <a:solidFill>
+                  <a:srgbClr val="FFFFFF"/>
+                </a:solidFill>
+                <a:latin typeface="Arial"/>
+              </a:rPr>
+              <a:t>2010–2025 оны хуучин мэдээлэл системд бүрэн шилжсэн.</a:t>
+            </a:r>
+          </a:p>
+          <a:p>
+            <a:pPr>
+              <a:spcBef>
+                <a:spcPts val="360"/>
+              </a:spcBef>
+            </a:pPr>
+            <a:r>
+              <a:rPr sz="1050" b="0">
+                <a:solidFill>
+                  <a:srgbClr val="B9CADC"/>
+                </a:solidFill>
+                <a:latin typeface="Arial"/>
+              </a:rPr>
+              <a:t>Эксэлийн мөр бүр газар, үл хөдлөх, эд хөрөнгийн үнэлгээгээр задарч бүртгэгдсэн тул бичилтийн тоо эх мөрөөс их байна.</a:t>
+            </a:r>
+          </a:p>
+        </p:txBody>
+      </p:sp>
+      <p:sp>
+        <p:nvSpPr>
+          <p:cNvPr id="17" name="Rectangle 16"/>
+          <p:cNvSpPr/>
+          <p:nvPr/>
+        </p:nvSpPr>
+        <p:spPr>
+          <a:xfrm>
+            <a:off x="502920" y="6455664"/>
+            <a:ext cx="11185855" cy="10972"/>
+          </a:xfrm>
+          <a:prstGeom prst="rect">
+            <a:avLst/>
+          </a:prstGeom>
+          <a:solidFill>
+            <a:srgbClr val="DDE3E9"/>
+          </a:solidFill>
+          <a:ln>
+            <a:noFill/>
+          </a:ln>
+          <a:effectLst/>
+        </p:spPr>
+        <p:style>
+          <a:lnRef idx="1">
+            <a:schemeClr val="accent1"/>
+          </a:lnRef>
+          <a:fillRef idx="3">
+            <a:schemeClr val="accent1"/>
+          </a:fillRef>
+          <a:effectRef idx="2">
+            <a:schemeClr val="accent1"/>
+          </a:effectRef>
+          <a:fontRef idx="minor">
+            <a:schemeClr val="lt1"/>
+          </a:fontRef>
+        </p:style>
+        <p:txBody>
+          <a:bodyPr rtlCol="0" anchor="ctr"/>
+          <a:lstStyle/>
+          <a:p>
+            <a:pPr algn="ctr"/>
+          </a:p>
+        </p:txBody>
+      </p:sp>
+      <p:sp>
+        <p:nvSpPr>
+          <p:cNvPr id="18" name="TextBox 17"/>
+          <p:cNvSpPr txBox="1"/>
+          <p:nvPr/>
+        </p:nvSpPr>
+        <p:spPr>
+          <a:xfrm>
+            <a:off x="502920" y="6547104"/>
+            <a:ext cx="9144000" cy="201168"/>
+          </a:xfrm>
+          <a:prstGeom prst="rect">
+            <a:avLst/>
+          </a:prstGeom>
+          <a:noFill/>
+        </p:spPr>
+        <p:txBody>
+          <a:bodyPr wrap="square" lIns="0" rIns="0" tIns="0" bIns="0">
+            <a:spAutoFit/>
+          </a:bodyPr>
+          <a:lstStyle/>
+          <a:p>
+            <a:r>
+              <a:rPr sz="800" b="0">
+                <a:solidFill>
+                  <a:srgbClr val="8A929A"/>
+                </a:solidFill>
+                <a:latin typeface="Arial"/>
+              </a:rPr>
+              <a:t>Газар чөлөөлөлт, нөхөх олговрын нэгдсэн систем  ·  Систем хөгжүүлэлтийн техникийн тайлан</a:t>
+            </a:r>
+          </a:p>
+        </p:txBody>
+      </p:sp>
+      <p:sp>
+        <p:nvSpPr>
+          <p:cNvPr id="19" name="TextBox 18"/>
+          <p:cNvSpPr txBox="1"/>
+          <p:nvPr/>
+        </p:nvSpPr>
+        <p:spPr>
+          <a:xfrm>
+            <a:off x="10774375" y="6547104"/>
+            <a:ext cx="914400" cy="201168"/>
+          </a:xfrm>
+          <a:prstGeom prst="rect">
+            <a:avLst/>
+          </a:prstGeom>
+          <a:noFill/>
+        </p:spPr>
+        <p:txBody>
+          <a:bodyPr wrap="square" lIns="0" rIns="0" tIns="0" bIns="0">
+            <a:spAutoFit/>
+          </a:bodyPr>
+          <a:lstStyle/>
+          <a:p>
+            <a:pPr algn="r"/>
+            <a:r>
+              <a:rPr sz="900" b="1">
+                <a:solidFill>
+                  <a:srgbClr val="8A929A"/>
+                </a:solidFill>
+                <a:latin typeface="Arial"/>
+              </a:rPr>
+              <a:t>14</a:t>
             </a:r>
           </a:p>
         </p:txBody>
